--- a/산출물_보고/ppt output/철스크랩_라벨링컷오프_객관분석.pptx
+++ b/산출물_보고/ppt output/철스크랩_라벨링컷오프_객관분석.pptx
@@ -3525,7 +3525,7 @@
                 <a:ea typeface="Paperlogy 4 Regular"/>
                 <a:cs typeface="Paperlogy 4 Regular"/>
               </a:rPr>
-              <a:t>성격 · 내부 분석 보고자료 — 경과 서술 없이 정량 분석 전용</a:t>
+              <a:t>성격 · 내부 분석 보고자료 — 정량 분석만</a:t>
             </a:r>
           </a:p>
           <a:p>
@@ -3650,7 +3650,7 @@
                 <a:ea typeface="Paperlogy 6 SemiBold"/>
                 <a:cs typeface="Paperlogy 6 SemiBold"/>
               </a:rPr>
-              <a:t>핵심 수치</a:t>
+              <a:t>주요 수치</a:t>
             </a:r>
           </a:p>
           <a:p>
@@ -4941,7 +4941,7 @@
                 <a:ea typeface="Paperlogy 4 Regular"/>
                 <a:cs typeface="Paperlogy 4 Regular"/>
               </a:rPr>
-              <a:t>'생략 대상도 실물 스크랩' — 표기 필요성에 대한 처리 옵션별 trade-off (공수·가역성·지표·리스크)</a:t>
+              <a:t>생략 대상도 실물 스크랩 — 표기 옵션별 trade-off (공수·가역성·지표·리스크)</a:t>
             </a:r>
           </a:p>
         </p:txBody>
@@ -5987,7 +5987,7 @@
                 <a:ea typeface="Paperlogy 6 SemiBold"/>
                 <a:cs typeface="Paperlogy 6 SemiBold"/>
               </a:rPr>
-              <a:t>옵션은 상호 배타가 아님 — B+D 조합(24 px 개별 + 미만분 영역 1개) 시 개수·면적·가역성 모두 보존</a:t>
+              <a:t>옵션은 조합 가능 — B+D(24 px 개별 + 미만분 영역 1개)면 개수·면적·가역성 모두 유지</a:t>
             </a:r>
           </a:p>
           <a:p>
@@ -6008,7 +6008,7 @@
                 <a:ea typeface="Paperlogy 4 Regular"/>
                 <a:cs typeface="Paperlogy 4 Regular"/>
               </a:rPr>
-              <a:t>단 규칙이 늘수록 작업 일관성 리스크 증가 — 라벨링 가이드의 규칙 수는 최소 유지가 품질 관리에 유리</a:t>
+              <a:t>단 규칙이 늘수록 작업 일관성 저하 — 가이드 규칙 수는 최소로</a:t>
             </a:r>
           </a:p>
           <a:p>
@@ -6038,7 +6038,7 @@
                 <a:ea typeface="Paperlogy 6 SemiBold"/>
                 <a:cs typeface="Paperlogy 6 SemiBold"/>
               </a:rPr>
-              <a:t>C는 과거 데이터에서 실증된 실패 모드 보유 — rebar 덩어리 라벨 다수 발견·정제 이력</a:t>
+              <a:t>C는 과거 데이터에서 실패 사례 있음 — rebar 덩어리 라벨 다수 발견·정제 이력</a:t>
             </a:r>
           </a:p>
           <a:p>
@@ -6059,7 +6059,7 @@
                 <a:ea typeface="Paperlogy 4 Regular"/>
                 <a:cs typeface="Paperlogy 4 Regular"/>
               </a:rPr>
-              <a:t>채택 시 '개별 식별+크기 통과만 개별, 얽힌 다발은 묶음 1개' 일관성 규칙의 계약 수준 명문화가 전제</a:t>
+              <a:t>채택 시 '개별 식별+크기 통과만 개별, 얽힌 다발은 묶음 1개' 규칙을 문서로 명시해야 함</a:t>
             </a:r>
           </a:p>
         </p:txBody>
@@ -6572,7 +6572,7 @@
                 <a:ea typeface="Paperlogy 4 Regular"/>
                 <a:cs typeface="Paperlogy 4 Regular"/>
               </a:rPr>
-              <a:t>라벨 하한(사람·비가역) 24 px와 학습 필터(코드·가역) 30 px의 분리 — 필터 코드 기구현·검증 완료</a:t>
+              <a:t>라벨 하한(사람·비가역) 24 px와 학습 필터(코드·가역) 30 px 분리 — 필터 코드 구현·검증 완료</a:t>
             </a:r>
           </a:p>
         </p:txBody>
@@ -7243,7 +7243,7 @@
                 <a:ea typeface="Paperlogy 4 Regular"/>
                 <a:cs typeface="Paperlogy 4 Regular"/>
               </a:rPr>
-              <a:t>편익 — ① 가역성: 입력 상향(1600/1920)·tile 추론 도입 시 필터 해제만으로 즉시 활용 ② 지표 유연성: 원본/필터 기준 병행 재계산 ③ 컷 경계 객체의 축소 증강 안전 마진</a:t>
+              <a:t>편익 — ① 가역성: 입력 상향(1600/1920)·tile 추론 시 필터 해제로 바로 활용 ② 원본/필터 기준 병행 재계산 ③ 컷 경계 객체의 축소 증강 여유</a:t>
             </a:r>
           </a:p>
           <a:p>
@@ -7273,7 +7273,7 @@
                 <a:ea typeface="Paperlogy 6 SemiBold"/>
                 <a:cs typeface="Paperlogy 6 SemiBold"/>
               </a:rPr>
-              <a:t>'전부 그리는 완전 보수'는 정량 근거 없음 — 보수의 실익은 24~30 px 구간에 집중</a:t>
+              <a:t>'전부 그리기'는 정량 근거 없음 — 보수안의 이득은 24~30 px 구간에 한정</a:t>
             </a:r>
           </a:p>
           <a:p>
@@ -7294,7 +7294,7 @@
                 <a:ea typeface="Paperlogy 4 Regular"/>
                 <a:cs typeface="Paperlogy 4 Regular"/>
               </a:rPr>
-              <a:t>12 px 미만은 GT 자체가 소실(생존율 55~92% · IoU≥0.5 6~21%)되어 라벨링해도 물리적으로 학습 전달 불가</a:t>
+              <a:t>12 px 미만은 GT 자체가 사라져(생존율 55~92% · IoU≥0.5 6~21%) 라벨링해도 학습에 전달 안 됨</a:t>
             </a:r>
           </a:p>
         </p:txBody>
@@ -7807,7 +7807,7 @@
                 <a:ea typeface="Paperlogy 4 Regular"/>
                 <a:cs typeface="Paperlogy 4 Regular"/>
               </a:rPr>
-              <a:t>수치 해석 시 유의 사항 — 단일 run 분산 · 면적 중복 · 보수 하한의 전제 조건</a:t>
+              <a:t>수치 해석 시 주의 — 단일 run 분산 · 면적 중복 · 보수 하한의 전제</a:t>
             </a:r>
           </a:p>
         </p:txBody>
@@ -7974,7 +7974,7 @@
                 <a:ea typeface="Paperlogy 4 Regular"/>
                 <a:cs typeface="Paperlogy 4 Regular"/>
               </a:rPr>
-              <a:t>정책 간 0.3~0.4%p 차이는 seed 반복 검증 전까지 통계적으로 확정하지 않음</a:t>
+              <a:t>정책 간 0.3~0.4%p 차이는 seed 반복 전까지 판정 유보</a:t>
             </a:r>
           </a:p>
           <a:p>
@@ -8004,7 +8004,7 @@
                 <a:ea typeface="Paperlogy 6 SemiBold"/>
                 <a:cs typeface="Paperlogy 6 SemiBold"/>
               </a:rPr>
-              <a:t>보수 하한(24 px)의 실익은 '입력 상향 시 소형 검출 회복' 가정에 의존</a:t>
+              <a:t>보수 하한(24 px)의 이득은 '입력 상향 시 소형 검출 회복' 가정에 의존</a:t>
             </a:r>
           </a:p>
           <a:p>
@@ -8127,7 +8127,7 @@
                 <a:ea typeface="Paperlogy 4 Regular"/>
                 <a:cs typeface="Paperlogy 4 Regular"/>
               </a:rPr>
-              <a:t>채택 검토 시 파일럿 라벨링(수십 장 규모)으로 공수·일관성 실측이 선행 조건</a:t>
+              <a:t>채택 검토 전 파일럿 라벨링(수십 장)으로 공수·일관성 실측 필요</a:t>
             </a:r>
           </a:p>
         </p:txBody>
@@ -8640,7 +8640,7 @@
                 <a:ea typeface="Paperlogy 4 Regular"/>
                 <a:cs typeface="Paperlogy 4 Regular"/>
               </a:rPr>
-              <a:t>본 보고서 수치의 1차 출처 — 모든 결과는 CSV·로그·가중치로 재현 가능</a:t>
+              <a:t>수치의 1차 출처 — 전부 CSV·로그·가중치로 재현 가능</a:t>
             </a:r>
           </a:p>
         </p:txBody>
@@ -9881,7 +9881,7 @@
                 <a:ea typeface="Paperlogy 4 Regular"/>
                 <a:cs typeface="Paperlogy 4 Regular"/>
               </a:rPr>
-              <a:t>용어의 조작적 정의 → 생략 규모·성능·물리 한계의 정량 → 소형 객체 표기 옵션과 권고 체계 순서</a:t>
+              <a:t>용어 정의 → 생략 규모·성능·물리 한계 정량 → 소형 객체 표기 옵션과 권고 체계</a:t>
             </a:r>
           </a:p>
         </p:txBody>
@@ -10026,7 +10026,7 @@
                 <a:ea typeface="Paperlogy 4 Regular"/>
                 <a:cs typeface="Paperlogy 4 Regular"/>
               </a:rPr>
-              <a:t>'그린다/생략'의 조작적 정의 · cutoff 환산 · 면적비 · 세장형 예외 규칙</a:t>
+              <a:t>'그린다/생략'의 정의 · cutoff 환산 · 면적비 · 가늘고 긴 물체(세장형) 예외 규칙</a:t>
             </a:r>
           </a:p>
         </p:txBody>
@@ -10909,7 +10909,7 @@
                 <a:ea typeface="Paperlogy 6 SemiBold"/>
                 <a:cs typeface="Paperlogy 6 SemiBold"/>
               </a:rPr>
-              <a:t>'그린다/생략'의 조작적 정의 · cutoff 환산 · 면적비 · 세장형 예외 규칙</a:t>
+              <a:t>'그린다/생략'의 정의 · cutoff 환산 · 면적비 · 가늘고 긴 물체(세장형) 예외 규칙</a:t>
             </a:r>
           </a:p>
         </p:txBody>
@@ -11833,7 +11833,7 @@
                 <a:ea typeface="Paperlogy 4 Regular"/>
                 <a:cs typeface="Paperlogy 4 Regular"/>
               </a:rPr>
-              <a:t>'그린다' = 어노테이션 도구에서 객체 윤곽 polygon을 생성하는 작업 — cutoff는 이 작업의 생략 하한</a:t>
+              <a:t>'그린다' = 라벨링 도구에서 객체 윤곽 polygon을 만드는 작업 · cutoff = 이 작업의 생략 하한</a:t>
             </a:r>
           </a:p>
         </p:txBody>
@@ -11949,7 +11949,7 @@
                 <a:ea typeface="Paperlogy 4 Regular"/>
                 <a:cs typeface="Paperlogy 4 Regular"/>
               </a:rPr>
-              <a:t>생략 시 JSON에 해당 객체 항목이 남지 않음 — 해당 픽셀은 배경(라벨 없음)으로 학습·평가에서 제외됨</a:t>
+              <a:t>생략 시 JSON에 객체 항목 없음 — 해당 픽셀은 배경으로 학습·평가에서 제외</a:t>
             </a:r>
           </a:p>
           <a:p>
@@ -11979,7 +11979,7 @@
                 <a:ea typeface="Paperlogy 6 SemiBold"/>
                 <a:cs typeface="Paperlogy 6 SemiBold"/>
               </a:rPr>
-              <a:t>'생략' = 삭제가 아니라 polygon 생성 작업의 하한 — 이미지·기존 라벨은 불변</a:t>
+              <a:t>'생략' = polygon 생성 작업의 하한 — 이미지·기존 라벨은 그대로</a:t>
             </a:r>
           </a:p>
           <a:p>
@@ -12000,7 +12000,7 @@
                 <a:ea typeface="Paperlogy 4 Regular"/>
                 <a:cs typeface="Paperlogy 4 Regular"/>
               </a:rPr>
-              <a:t>동일 기준이 학습 데이터 생성 코드 필터(prepare_yolo_dataset.py)로도 구현되어 있음 — 시뮬레이션 정책표와 ±0.1% 일치 검증</a:t>
+              <a:t>같은 기준을 학습 데이터 생성 코드 필터(prepare_yolo_dataset.py)로 구현 — 시뮬레이션 정책표와 ±0.1% 일치</a:t>
             </a:r>
           </a:p>
           <a:p>
@@ -12030,7 +12030,7 @@
                 <a:ea typeface="Paperlogy 6 SemiBold"/>
                 <a:cs typeface="Paperlogy 6 SemiBold"/>
               </a:rPr>
-              <a:t>cutoff는 bbox 한 변이 아니라 √(polygon 면적) 기준 — 해상도 단계별 환산은 아래 표</a:t>
+              <a:t>cutoff 기준 = √(polygon 면적), bbox 한 변 아님 — 해상도 단계별 환산은 아래 표</a:t>
             </a:r>
           </a:p>
         </p:txBody>
@@ -12967,7 +12967,7 @@
                 <a:ea typeface="Paperlogy 7 Bold"/>
                 <a:cs typeface="Paperlogy 7 Bold"/>
               </a:rPr>
-              <a:t>세장형의 정의와 예외 규칙</a:t>
+              <a:t>가늘고 긴 물체(세장형)의 정의와 예외 규칙</a:t>
             </a:r>
           </a:p>
         </p:txBody>
@@ -13098,7 +13098,7 @@
                 <a:ea typeface="Paperlogy 4 Regular"/>
                 <a:cs typeface="Paperlogy 4 Regular"/>
               </a:rPr>
-              <a:t>세장형 = 폭 대비 길이가 큰 선형 객체(rebar·pipe류) — 면적 미달이어도 긴 변 72 px 이상이면 라벨 유지</a:t>
+              <a:t>세장형 = 폭에 비해 긴 물체(rebar·pipe류) — 면적 미달이어도 긴 변 72 px 이상이면 라벨 유지</a:t>
             </a:r>
           </a:p>
         </p:txBody>
@@ -13214,7 +13214,7 @@
                 <a:ea typeface="Paperlogy 4 Regular"/>
                 <a:cs typeface="Paperlogy 4 Regular"/>
               </a:rPr>
-              <a:t>면적 cutoff만 적용 시 화면을 가로지르는 rebar가 통째로 생략되는 문제 — 예외 규칙의 필요 근거</a:t>
+              <a:t>면적 cutoff만 적용하면 화면을 가로지르는 rebar가 통째로 생략됨 — 예외 규칙의 근거</a:t>
             </a:r>
           </a:p>
           <a:p>
@@ -13265,7 +13265,7 @@
                 <a:ea typeface="Paperlogy 4 Regular"/>
                 <a:cs typeface="Paperlogy 4 Regular"/>
               </a:rPr>
-              <a:t>예외 제거 시 전체 +0.35%p이나 rebar AP50 −40%(0.1055→0.0634) — 예외 유지 확정 (exp6)</a:t>
+              <a:t>예외 제거 시 전체 +0.35%p, rebar AP50 −40%(0.1055→0.0634) — 예외 유지 (exp6)</a:t>
             </a:r>
           </a:p>
           <a:p>
@@ -14925,7 +14925,7 @@
                 <a:ea typeface="Paperlogy 4 Regular"/>
                 <a:cs typeface="Paperlogy 4 Regular"/>
               </a:rPr>
-              <a:t>확정안(30 px+예외) 적용 시 개수는 절반 생략되나 라벨 면적의 93.3%는 유지 (N=501,377 전수)</a:t>
+              <a:t>확정안(30 px+예외) 적용 시 개수는 절반 생략, 라벨 면적은 93.3% 유지 (N=501,377 전수)</a:t>
             </a:r>
           </a:p>
         </p:txBody>
@@ -15169,7 +15169,7 @@
                 <a:ea typeface="Paperlogy 4 Regular"/>
                 <a:cs typeface="Paperlogy 4 Regular"/>
               </a:rPr>
-              <a:t>'생략이 너무 많다'는 인상은 개수 축에서만 성립</a:t>
+              <a:t>'생략이 많다'는 인상은 개수 기준에서만 해당</a:t>
             </a:r>
           </a:p>
           <a:p>
@@ -15199,7 +15199,7 @@
                 <a:ea typeface="Paperlogy 6 SemiBold"/>
                 <a:cs typeface="Paperlogy 6 SemiBold"/>
               </a:rPr>
-              <a:t>면적 기준 6.69% 생략 — 물량 정보 93.3% 보존</a:t>
+              <a:t>면적 기준 6.69% 생략 — 물량 정보 93.3% 유지</a:t>
             </a:r>
           </a:p>
           <a:p>
@@ -15220,7 +15220,7 @@
                 <a:ea typeface="Paperlogy 4 Regular"/>
                 <a:cs typeface="Paperlogy 4 Regular"/>
               </a:rPr>
-              <a:t>frame 전체 대비 0.605% · 생략 대상은 개당 frame의 0.011% 미만 초소형</a:t>
+              <a:t>frame 전체 대비 0.605% · 생략 대상은 개당 frame의 0.011% 미만</a:t>
             </a:r>
           </a:p>
           <a:p>
@@ -15271,7 +15271,7 @@
                 <a:ea typeface="Paperlogy 4 Regular"/>
                 <a:cs typeface="Paperlogy 4 Regular"/>
               </a:rPr>
-              <a:t>대형 클래스(handler·drum·Guillotine)는 영향 미미 · 세장형 예외로 small pipe 87→76%·rebar 86→70%로 완화</a:t>
+              <a:t>대형 클래스(handler·drum·Guillotine)는 영향 작음 · 세장형 예외로 small pipe 87→76%·rebar 86→70%</a:t>
             </a:r>
           </a:p>
         </p:txBody>
@@ -15653,7 +15653,7 @@
                 <a:ea typeface="Paperlogy 7 Bold"/>
                 <a:cs typeface="Paperlogy 7 Bold"/>
               </a:rPr>
-              <a:t>cutoff 수준별 성능 영향 — 30 px 확정 근거</a:t>
+              <a:t>cutoff 수준별 성능 영향 — 30 px 선택 근거</a:t>
             </a:r>
           </a:p>
         </p:txBody>
@@ -17048,7 +17048,7 @@
                 <a:ea typeface="Paperlogy 6 SemiBold"/>
                 <a:cs typeface="Paperlogy 6 SemiBold"/>
               </a:rPr>
-              <a:t>자기 val 상승(0.487→0.744)은 평가셋이 쉬워진 효과</a:t>
+              <a:t>자기 val 상승(0.487→0.744) = 평가셋이 쉬워진 효과</a:t>
             </a:r>
           </a:p>
           <a:p>
@@ -17069,7 +17069,7 @@
                 <a:ea typeface="Paperlogy 4 Regular"/>
                 <a:cs typeface="Paperlogy 4 Regular"/>
               </a:rPr>
-              <a:t>공통 val로 재평가하면 부호 반전(0.487→0.430) — 판정 축은 공통 val</a:t>
+              <a:t>공통 val로 재평가하면 하락(0.487→0.430) — 판정 기준은 공통 val</a:t>
             </a:r>
           </a:p>
           <a:p>
@@ -17120,7 +17120,7 @@
                 <a:ea typeface="Paperlogy 4 Regular"/>
                 <a:cs typeface="Paperlogy 4 Regular"/>
               </a:rPr>
-              <a:t>24 px 이상에 학습 신호가 사실상 전부 포함(−0.15%p) — 36 px↑는 손실 가속으로 기각</a:t>
+              <a:t>24 px 이상에 학습 신호 대부분 포함(−0.15%p) — 36 px 이상은 손실 커져 채택 안 함</a:t>
             </a:r>
           </a:p>
         </p:txBody>
@@ -17740,7 +17740,7 @@
                 <a:ea typeface="Paperlogy 4 Regular"/>
                 <a:cs typeface="Paperlogy 4 Regular"/>
               </a:rPr>
-              <a:t>30 px 미만은 GT부터 stride 4에서 훼손 · 무필터 학습 모델도 rebar 77%·small pipe 72% 미검출</a:t>
+              <a:t>30 px 미만은 GT부터 stride 4에서 손상 · 무필터 학습 모델도 rebar 77%·small pipe 72% 미검출</a:t>
             </a:r>
           </a:p>
         </p:txBody>
@@ -17835,7 +17835,7 @@
                 <a:ea typeface="Paperlogy 6 SemiBold"/>
                 <a:cs typeface="Paperlogy 6 SemiBold"/>
               </a:rPr>
-              <a:t>GT 훼손 — 원본 18 px 미만은 과반이 복원 IoU&lt;0.5, 30 px 이상은 97%+ 보존 (좌측 그림)</a:t>
+              <a:t>GT 손상 — 원본 18 px 미만은 과반이 복원 IoU&lt;0.5, 30 px 이상은 97%+ 유지 (좌측 그림)</a:t>
             </a:r>
           </a:p>
           <a:p>
@@ -17856,7 +17856,7 @@
                 <a:ea typeface="Paperlogy 4 Regular"/>
                 <a:cs typeface="Paperlogy 4 Regular"/>
               </a:rPr>
-              <a:t>라벨을 그려도 학습 GT 생성(1/4 downsample) 단계에서 형상이 소실되는 구간 — cutoff 30 px의 물리적 근거</a:t>
+              <a:t>라벨을 그려도 학습 GT 생성(1/4 downsample)에서 형상이 사라지는 구간 — cutoff 30 px의 근거</a:t>
             </a:r>
           </a:p>
           <a:p>
@@ -17886,7 +17886,7 @@
                 <a:ea typeface="Paperlogy 6 SemiBold"/>
                 <a:cs typeface="Paperlogy 6 SemiBold"/>
               </a:rPr>
-              <a:t>검출 실증 — base(무필터 학습) 모델도 소형·세장형 대부분을 background로 누락 (우측 그림)</a:t>
+              <a:t>검출 실측 — base(무필터 학습) 모델도 소형·세장형 대부분을 background로 놓침 (우측 그림)</a:t>
             </a:r>
           </a:p>
           <a:p>
@@ -17907,7 +17907,7 @@
                 <a:ea typeface="Paperlogy 4 Regular"/>
                 <a:cs typeface="Paperlogy 4 Regular"/>
               </a:rPr>
-              <a:t>trash 82%·rebar 77%·small pipe 72% 미검출(전체 mask recall ≈0.49) — 미회수 구간과 생략 구간 일치</a:t>
+              <a:t>trash 82%·rebar 77%·small pipe 72% 미검출(전체 mask recall ≈0.49) — 미검출 구간 = 생략 구간</a:t>
             </a:r>
           </a:p>
         </p:txBody>
